--- a/tests/tmp/opc_valid_merge.pptx
+++ b/tests/tmp/opc_valid_merge.pptx
@@ -2,7 +2,7 @@
 <file path=ppt/presentation.xml><?xml version="1.0" encoding="utf-8"?>
 <p:presentation xmlns:a="http://schemas.openxmlformats.org/drawingml/2006/main" xmlns:r="http://schemas.openxmlformats.org/officeDocument/2006/relationships" xmlns:p="http://schemas.openxmlformats.org/presentationml/2006/main" saveSubsetFonts="1">
   <p:sldMasterIdLst>
-    <p:sldMasterId id="2147483899" r:id="rId1"/>
+    <p:sldMasterId id="2147484692" r:id="rId1"/>
   </p:sldMasterIdLst>
   <p:notesMasterIdLst>
     <p:notesMasterId r:id="rId5"/>

--- a/tests/tmp/opc_valid_merge.pptx
+++ b/tests/tmp/opc_valid_merge.pptx
@@ -2,7 +2,7 @@
 <file path=ppt/presentation.xml><?xml version="1.0" encoding="utf-8"?>
 <p:presentation xmlns:a="http://schemas.openxmlformats.org/drawingml/2006/main" xmlns:r="http://schemas.openxmlformats.org/officeDocument/2006/relationships" xmlns:p="http://schemas.openxmlformats.org/presentationml/2006/main" saveSubsetFonts="1">
   <p:sldMasterIdLst>
-    <p:sldMasterId id="2147484692" r:id="rId1"/>
+    <p:sldMasterId id="2147485523" r:id="rId1"/>
   </p:sldMasterIdLst>
   <p:notesMasterIdLst>
     <p:notesMasterId r:id="rId5"/>
